--- a/ゲーム科1年/01_後期/プログラミングⅢ/20_キャスト.pptx
+++ b/ゲーム科1年/01_後期/プログラミングⅢ/20_キャスト.pptx
@@ -271,7 +271,7 @@
           <a:p>
             <a:fld id="{E9CC885B-4903-4D54-9A93-00025F12DED9}" type="datetimeFigureOut">
               <a:rPr kumimoji="1" lang="ja-JP" altLang="en-US" smtClean="0"/>
-              <a:t>2024/11/13</a:t>
+              <a:t>2025/3/3</a:t>
             </a:fld>
             <a:endParaRPr kumimoji="1" lang="ja-JP" altLang="en-US"/>
           </a:p>
@@ -501,7 +501,7 @@
           <a:p>
             <a:fld id="{E9CC885B-4903-4D54-9A93-00025F12DED9}" type="datetimeFigureOut">
               <a:rPr kumimoji="1" lang="ja-JP" altLang="en-US" smtClean="0"/>
-              <a:t>2024/11/13</a:t>
+              <a:t>2025/3/3</a:t>
             </a:fld>
             <a:endParaRPr kumimoji="1" lang="ja-JP" altLang="en-US"/>
           </a:p>
@@ -741,7 +741,7 @@
           <a:p>
             <a:fld id="{E9CC885B-4903-4D54-9A93-00025F12DED9}" type="datetimeFigureOut">
               <a:rPr kumimoji="1" lang="ja-JP" altLang="en-US" smtClean="0"/>
-              <a:t>2024/11/13</a:t>
+              <a:t>2025/3/3</a:t>
             </a:fld>
             <a:endParaRPr kumimoji="1" lang="ja-JP" altLang="en-US"/>
           </a:p>
@@ -971,7 +971,7 @@
           <a:p>
             <a:fld id="{E9CC885B-4903-4D54-9A93-00025F12DED9}" type="datetimeFigureOut">
               <a:rPr kumimoji="1" lang="ja-JP" altLang="en-US" smtClean="0"/>
-              <a:t>2024/11/13</a:t>
+              <a:t>2025/3/3</a:t>
             </a:fld>
             <a:endParaRPr kumimoji="1" lang="ja-JP" altLang="en-US"/>
           </a:p>
@@ -1246,7 +1246,7 @@
           <a:p>
             <a:fld id="{E9CC885B-4903-4D54-9A93-00025F12DED9}" type="datetimeFigureOut">
               <a:rPr kumimoji="1" lang="ja-JP" altLang="en-US" smtClean="0"/>
-              <a:t>2024/11/13</a:t>
+              <a:t>2025/3/3</a:t>
             </a:fld>
             <a:endParaRPr kumimoji="1" lang="ja-JP" altLang="en-US"/>
           </a:p>
@@ -1575,7 +1575,7 @@
           <a:p>
             <a:fld id="{E9CC885B-4903-4D54-9A93-00025F12DED9}" type="datetimeFigureOut">
               <a:rPr kumimoji="1" lang="ja-JP" altLang="en-US" smtClean="0"/>
-              <a:t>2024/11/13</a:t>
+              <a:t>2025/3/3</a:t>
             </a:fld>
             <a:endParaRPr kumimoji="1" lang="ja-JP" altLang="en-US"/>
           </a:p>
@@ -2051,7 +2051,7 @@
           <a:p>
             <a:fld id="{E9CC885B-4903-4D54-9A93-00025F12DED9}" type="datetimeFigureOut">
               <a:rPr kumimoji="1" lang="ja-JP" altLang="en-US" smtClean="0"/>
-              <a:t>2024/11/13</a:t>
+              <a:t>2025/3/3</a:t>
             </a:fld>
             <a:endParaRPr kumimoji="1" lang="ja-JP" altLang="en-US"/>
           </a:p>
@@ -2192,7 +2192,7 @@
           <a:p>
             <a:fld id="{E9CC885B-4903-4D54-9A93-00025F12DED9}" type="datetimeFigureOut">
               <a:rPr kumimoji="1" lang="ja-JP" altLang="en-US" smtClean="0"/>
-              <a:t>2024/11/13</a:t>
+              <a:t>2025/3/3</a:t>
             </a:fld>
             <a:endParaRPr kumimoji="1" lang="ja-JP" altLang="en-US"/>
           </a:p>
@@ -2305,7 +2305,7 @@
           <a:p>
             <a:fld id="{E9CC885B-4903-4D54-9A93-00025F12DED9}" type="datetimeFigureOut">
               <a:rPr kumimoji="1" lang="ja-JP" altLang="en-US" smtClean="0"/>
-              <a:t>2024/11/13</a:t>
+              <a:t>2025/3/3</a:t>
             </a:fld>
             <a:endParaRPr kumimoji="1" lang="ja-JP" altLang="en-US"/>
           </a:p>
@@ -2648,7 +2648,7 @@
           <a:p>
             <a:fld id="{E9CC885B-4903-4D54-9A93-00025F12DED9}" type="datetimeFigureOut">
               <a:rPr kumimoji="1" lang="ja-JP" altLang="en-US" smtClean="0"/>
-              <a:t>2024/11/13</a:t>
+              <a:t>2025/3/3</a:t>
             </a:fld>
             <a:endParaRPr kumimoji="1" lang="ja-JP" altLang="en-US"/>
           </a:p>
@@ -2936,7 +2936,7 @@
           <a:p>
             <a:fld id="{E9CC885B-4903-4D54-9A93-00025F12DED9}" type="datetimeFigureOut">
               <a:rPr kumimoji="1" lang="ja-JP" altLang="en-US" smtClean="0"/>
-              <a:t>2024/11/13</a:t>
+              <a:t>2025/3/3</a:t>
             </a:fld>
             <a:endParaRPr kumimoji="1" lang="ja-JP" altLang="en-US"/>
           </a:p>
@@ -3209,7 +3209,7 @@
           <a:p>
             <a:fld id="{E9CC885B-4903-4D54-9A93-00025F12DED9}" type="datetimeFigureOut">
               <a:rPr kumimoji="1" lang="ja-JP" altLang="en-US" smtClean="0"/>
-              <a:t>2024/11/13</a:t>
+              <a:t>2025/3/3</a:t>
             </a:fld>
             <a:endParaRPr kumimoji="1" lang="ja-JP" altLang="en-US"/>
           </a:p>
@@ -4123,12 +4123,24 @@
               <a:t>続いて</a:t>
             </a:r>
             <a:r>
-              <a:rPr lang="en-US" altLang="ja-JP" sz="2400" dirty="0"/>
-              <a:t>Main</a:t>
+              <a:rPr lang="en-US" altLang="ja-JP" sz="2400" b="1" dirty="0">
+                <a:solidFill>
+                  <a:srgbClr val="0070C0"/>
+                </a:solidFill>
+              </a:rPr>
+              <a:t>main</a:t>
+            </a:r>
+            <a:r>
+              <a:rPr lang="ja-JP" altLang="en-US" sz="2400" b="1" dirty="0">
+                <a:solidFill>
+                  <a:srgbClr val="0070C0"/>
+                </a:solidFill>
+              </a:rPr>
+              <a:t>関数</a:t>
             </a:r>
             <a:r>
               <a:rPr lang="ja-JP" altLang="en-US" sz="2400" dirty="0"/>
-              <a:t>関数を新しく書きます。</a:t>
+              <a:t>を新しく書きます。</a:t>
             </a:r>
             <a:endParaRPr lang="en-US" altLang="ja-JP" sz="2400" dirty="0"/>
           </a:p>
@@ -5349,12 +5361,24 @@
               <a:t>続いて、新しく</a:t>
             </a:r>
             <a:r>
-              <a:rPr lang="en-US" altLang="ja-JP" sz="2400" dirty="0"/>
+              <a:rPr lang="en-US" altLang="ja-JP" sz="2400" b="1" dirty="0">
+                <a:solidFill>
+                  <a:srgbClr val="0070C0"/>
+                </a:solidFill>
+              </a:rPr>
               <a:t>main</a:t>
             </a:r>
             <a:r>
+              <a:rPr lang="ja-JP" altLang="en-US" sz="2400" b="1" dirty="0">
+                <a:solidFill>
+                  <a:srgbClr val="0070C0"/>
+                </a:solidFill>
+              </a:rPr>
+              <a:t>関数</a:t>
+            </a:r>
+            <a:r>
               <a:rPr lang="ja-JP" altLang="en-US" sz="2400" dirty="0"/>
-              <a:t>関数を書きます。</a:t>
+              <a:t>を書きます。</a:t>
             </a:r>
             <a:endParaRPr lang="en-US" altLang="ja-JP" sz="2400" dirty="0"/>
           </a:p>
@@ -5909,12 +5933,24 @@
               <a:t>続いて</a:t>
             </a:r>
             <a:r>
-              <a:rPr lang="en-US" altLang="ja-JP" sz="2400" dirty="0"/>
-              <a:t>Main</a:t>
+              <a:rPr lang="en-US" altLang="ja-JP" sz="2400" b="1" dirty="0">
+                <a:solidFill>
+                  <a:srgbClr val="0070C0"/>
+                </a:solidFill>
+              </a:rPr>
+              <a:t>main</a:t>
+            </a:r>
+            <a:r>
+              <a:rPr lang="ja-JP" altLang="en-US" sz="2400" b="1" dirty="0">
+                <a:solidFill>
+                  <a:srgbClr val="0070C0"/>
+                </a:solidFill>
+              </a:rPr>
+              <a:t>関数</a:t>
             </a:r>
             <a:r>
               <a:rPr lang="ja-JP" altLang="en-US" sz="2400" dirty="0"/>
-              <a:t>関数を新しく書きます。</a:t>
+              <a:t>を新しく書きます。</a:t>
             </a:r>
             <a:endParaRPr lang="en-US" altLang="ja-JP" sz="2400" dirty="0"/>
           </a:p>
